--- a/Projeto Integrador/Projeto Integrador Ariane.pptx
+++ b/Projeto Integrador/Projeto Integrador Ariane.pptx
@@ -267,7 +267,7 @@
           <a:p>
             <a:fld id="{6EF1D610-E6B3-423C-BE46-6B9E5095FAE0}" type="datetimeFigureOut">
               <a:rPr lang="pt-BR" smtClean="0"/>
-              <a:t>05/04/2026</a:t>
+              <a:t>06/04/2026</a:t>
             </a:fld>
             <a:endParaRPr lang="pt-BR"/>
           </a:p>
@@ -465,7 +465,7 @@
           <a:p>
             <a:fld id="{6EF1D610-E6B3-423C-BE46-6B9E5095FAE0}" type="datetimeFigureOut">
               <a:rPr lang="pt-BR" smtClean="0"/>
-              <a:t>05/04/2026</a:t>
+              <a:t>06/04/2026</a:t>
             </a:fld>
             <a:endParaRPr lang="pt-BR"/>
           </a:p>
@@ -673,7 +673,7 @@
           <a:p>
             <a:fld id="{6EF1D610-E6B3-423C-BE46-6B9E5095FAE0}" type="datetimeFigureOut">
               <a:rPr lang="pt-BR" smtClean="0"/>
-              <a:t>05/04/2026</a:t>
+              <a:t>06/04/2026</a:t>
             </a:fld>
             <a:endParaRPr lang="pt-BR"/>
           </a:p>
@@ -871,7 +871,7 @@
           <a:p>
             <a:fld id="{6EF1D610-E6B3-423C-BE46-6B9E5095FAE0}" type="datetimeFigureOut">
               <a:rPr lang="pt-BR" smtClean="0"/>
-              <a:t>05/04/2026</a:t>
+              <a:t>06/04/2026</a:t>
             </a:fld>
             <a:endParaRPr lang="pt-BR"/>
           </a:p>
@@ -1146,7 +1146,7 @@
           <a:p>
             <a:fld id="{6EF1D610-E6B3-423C-BE46-6B9E5095FAE0}" type="datetimeFigureOut">
               <a:rPr lang="pt-BR" smtClean="0"/>
-              <a:t>05/04/2026</a:t>
+              <a:t>06/04/2026</a:t>
             </a:fld>
             <a:endParaRPr lang="pt-BR"/>
           </a:p>
@@ -1411,7 +1411,7 @@
           <a:p>
             <a:fld id="{6EF1D610-E6B3-423C-BE46-6B9E5095FAE0}" type="datetimeFigureOut">
               <a:rPr lang="pt-BR" smtClean="0"/>
-              <a:t>05/04/2026</a:t>
+              <a:t>06/04/2026</a:t>
             </a:fld>
             <a:endParaRPr lang="pt-BR"/>
           </a:p>
@@ -1823,7 +1823,7 @@
           <a:p>
             <a:fld id="{6EF1D610-E6B3-423C-BE46-6B9E5095FAE0}" type="datetimeFigureOut">
               <a:rPr lang="pt-BR" smtClean="0"/>
-              <a:t>05/04/2026</a:t>
+              <a:t>06/04/2026</a:t>
             </a:fld>
             <a:endParaRPr lang="pt-BR"/>
           </a:p>
@@ -1964,7 +1964,7 @@
           <a:p>
             <a:fld id="{6EF1D610-E6B3-423C-BE46-6B9E5095FAE0}" type="datetimeFigureOut">
               <a:rPr lang="pt-BR" smtClean="0"/>
-              <a:t>05/04/2026</a:t>
+              <a:t>06/04/2026</a:t>
             </a:fld>
             <a:endParaRPr lang="pt-BR"/>
           </a:p>
@@ -2077,7 +2077,7 @@
           <a:p>
             <a:fld id="{6EF1D610-E6B3-423C-BE46-6B9E5095FAE0}" type="datetimeFigureOut">
               <a:rPr lang="pt-BR" smtClean="0"/>
-              <a:t>05/04/2026</a:t>
+              <a:t>06/04/2026</a:t>
             </a:fld>
             <a:endParaRPr lang="pt-BR"/>
           </a:p>
@@ -2388,7 +2388,7 @@
           <a:p>
             <a:fld id="{6EF1D610-E6B3-423C-BE46-6B9E5095FAE0}" type="datetimeFigureOut">
               <a:rPr lang="pt-BR" smtClean="0"/>
-              <a:t>05/04/2026</a:t>
+              <a:t>06/04/2026</a:t>
             </a:fld>
             <a:endParaRPr lang="pt-BR"/>
           </a:p>
@@ -2676,7 +2676,7 @@
           <a:p>
             <a:fld id="{6EF1D610-E6B3-423C-BE46-6B9E5095FAE0}" type="datetimeFigureOut">
               <a:rPr lang="pt-BR" smtClean="0"/>
-              <a:t>05/04/2026</a:t>
+              <a:t>06/04/2026</a:t>
             </a:fld>
             <a:endParaRPr lang="pt-BR"/>
           </a:p>
@@ -2917,7 +2917,7 @@
           <a:p>
             <a:fld id="{6EF1D610-E6B3-423C-BE46-6B9E5095FAE0}" type="datetimeFigureOut">
               <a:rPr lang="pt-BR" smtClean="0"/>
-              <a:t>05/04/2026</a:t>
+              <a:t>06/04/2026</a:t>
             </a:fld>
             <a:endParaRPr lang="pt-BR"/>
           </a:p>
@@ -3480,6 +3480,9 @@
   <p:clrMapOvr>
     <a:masterClrMapping/>
   </p:clrMapOvr>
+  <p:transition spd="slow">
+    <p:push dir="u"/>
+  </p:transition>
 </p:sld>
 </file>
 
@@ -4311,6 +4314,18 @@
   <p:clrMapOvr>
     <a:masterClrMapping/>
   </p:clrMapOvr>
+  <mc:AlternateContent xmlns:mc="http://schemas.openxmlformats.org/markup-compatibility/2006">
+    <mc:Choice xmlns:p14="http://schemas.microsoft.com/office/powerpoint/2010/main" Requires="p14">
+      <p:transition spd="med" p14:dur="700">
+        <p:fade/>
+      </p:transition>
+    </mc:Choice>
+    <mc:Fallback>
+      <p:transition spd="med">
+        <p:fade/>
+      </p:transition>
+    </mc:Fallback>
+  </mc:AlternateContent>
 </p:sld>
 </file>
 
@@ -4702,7 +4717,7 @@
         </p:spPr>
         <p:txBody>
           <a:bodyPr vert="horz" lIns="91440" tIns="45720" rIns="91440" bIns="45720" rtlCol="0">
-            <a:normAutofit lnSpcReduction="10000"/>
+            <a:normAutofit/>
           </a:bodyPr>
           <a:lstStyle/>
           <a:p>
@@ -5087,6 +5102,18 @@
   <p:clrMapOvr>
     <a:masterClrMapping/>
   </p:clrMapOvr>
+  <mc:AlternateContent xmlns:mc="http://schemas.openxmlformats.org/markup-compatibility/2006">
+    <mc:Choice xmlns:p14="http://schemas.microsoft.com/office/powerpoint/2010/main" Requires="p14">
+      <p:transition spd="slow" p14:dur="3400">
+        <p14:reveal/>
+      </p:transition>
+    </mc:Choice>
+    <mc:Fallback>
+      <p:transition spd="slow">
+        <p:fade/>
+      </p:transition>
+    </mc:Fallback>
+  </mc:AlternateContent>
 </p:sld>
 </file>
 
@@ -5782,6 +5809,9 @@
   <p:clrMapOvr>
     <a:masterClrMapping/>
   </p:clrMapOvr>
+  <p:transition spd="slow">
+    <p:randomBar dir="vert"/>
+  </p:transition>
 </p:sld>
 </file>
 
@@ -6387,6 +6417,18 @@
   <p:clrMapOvr>
     <a:masterClrMapping/>
   </p:clrMapOvr>
+  <mc:AlternateContent xmlns:mc="http://schemas.openxmlformats.org/markup-compatibility/2006">
+    <mc:Choice xmlns:p14="http://schemas.microsoft.com/office/powerpoint/2010/main" Requires="p14">
+      <p:transition spd="slow" p14:dur="800">
+        <p:circle/>
+      </p:transition>
+    </mc:Choice>
+    <mc:Fallback>
+      <p:transition spd="slow">
+        <p:circle/>
+      </p:transition>
+    </mc:Fallback>
+  </mc:AlternateContent>
 </p:sld>
 </file>
 
@@ -7122,6 +7164,9 @@
   <p:clrMapOvr>
     <a:masterClrMapping/>
   </p:clrMapOvr>
+  <p:transition spd="slow">
+    <p:wipe/>
+  </p:transition>
 </p:sld>
 </file>
 
@@ -7854,6 +7899,18 @@
   <p:clrMapOvr>
     <a:masterClrMapping/>
   </p:clrMapOvr>
+  <mc:AlternateContent xmlns:mc="http://schemas.openxmlformats.org/markup-compatibility/2006">
+    <mc:Choice xmlns:p14="http://schemas.microsoft.com/office/powerpoint/2010/main" Requires="p14">
+      <p:transition spd="slow" p14:dur="1500">
+        <p:split orient="vert"/>
+      </p:transition>
+    </mc:Choice>
+    <mc:Fallback>
+      <p:transition spd="slow">
+        <p:split orient="vert"/>
+      </p:transition>
+    </mc:Fallback>
+  </mc:AlternateContent>
 </p:sld>
 </file>
 
@@ -8728,6 +8785,9 @@
   <p:clrMapOvr>
     <a:masterClrMapping/>
   </p:clrMapOvr>
+  <p:transition spd="med">
+    <p:pull/>
+  </p:transition>
 </p:sld>
 </file>
 
@@ -10102,6 +10162,18 @@
   <p:clrMapOvr>
     <a:masterClrMapping/>
   </p:clrMapOvr>
+  <mc:AlternateContent xmlns:mc="http://schemas.openxmlformats.org/markup-compatibility/2006">
+    <mc:Choice xmlns:p14="http://schemas.microsoft.com/office/powerpoint/2010/main" Requires="p14">
+      <p:transition spd="slow">
+        <p14:flash/>
+      </p:transition>
+    </mc:Choice>
+    <mc:Fallback>
+      <p:transition spd="slow">
+        <p:fade/>
+      </p:transition>
+    </mc:Fallback>
+  </mc:AlternateContent>
 </p:sld>
 </file>
 
